--- a/public/fun/pack/pptx/talkpro/발표템플릿프리미엄_12_교육·강의_누드모카.pptx
+++ b/public/fun/pack/pptx/talkpro/발표템플릿프리미엄_12_교육·강의_누드모카.pptx
@@ -115,12 +115,12 @@
   <p:extLst>
     <p:ext uri="{521415D9-36F7-43E2-AB2F-B90AF26B5E84}">
       <p14:sectionLst xmlns:p14="http://schemas.microsoft.com/office/powerpoint/2010/main">
-        <p14:section name="시작" id="{45ADBB27-159A-4790-8ACE-964CB6B7D940}">
+        <p14:section name="시작" id="{DB68A2D9-4BD2-4592-AB3F-27153B5A5C11}">
           <p14:sldIdLst>
             <p14:sldId id="256"/>
           </p14:sldIdLst>
         </p14:section>
-        <p14:section name="본문" id="{AF42A407-1169-468F-A744-A8D776F746B1}">
+        <p14:section name="본문" id="{569BBEA5-1030-4F32-AD09-EC4AEE414E48}">
           <p14:sldIdLst>
             <p14:sldId id="257"/>
             <p14:sldId id="258"/>
@@ -131,7 +131,7 @@
             <p14:sldId id="263"/>
           </p14:sldIdLst>
         </p14:section>
-        <p14:section name="마무리" id="{4F23E929-CF01-48EA-88CA-990FBF0B14E7}">
+        <p14:section name="마무리" id="{C9F24040-0AAD-44E5-82AE-0081891974C3}">
           <p14:sldIdLst>
             <p14:sldId id="264"/>
           </p14:sldIdLst>
@@ -1911,7 +1911,7 @@
             </a:lvl1pPr>
           </a:lstStyle>
           <a:p>
-            <a:fld id="{2C53F507-E40F-4688-89B1-D539E8AA236B}" type="slidenum">
+            <a:fld id="{7153F043-2760-42F8-9536-8679E79CEE44}" type="slidenum">
               <a:rPr lang="en-US"/>
               <a:t>‹#›</a:t>
             </a:fld>
@@ -2608,7 +2608,7 @@
             </a:lvl1pPr>
           </a:lstStyle>
           <a:p>
-            <a:fld id="{1754A882-FFE0-4C70-9287-B38D011AA909}" type="slidenum">
+            <a:fld id="{D3E70319-483A-4748-A778-CA5BB5921122}" type="slidenum">
               <a:rPr lang="en-US"/>
               <a:t>‹#›</a:t>
             </a:fld>
@@ -3286,7 +3286,7 @@
             </a:lvl1pPr>
           </a:lstStyle>
           <a:p>
-            <a:fld id="{7DE9D29B-7CD8-422F-97AF-5AA47A982617}" type="slidenum">
+            <a:fld id="{0534F02A-6C4B-4E8C-AF87-44FC4E27672B}" type="slidenum">
               <a:rPr lang="en-US"/>
               <a:t>‹#›</a:t>
             </a:fld>
@@ -4177,7 +4177,7 @@
           <a:p>
             <a:r>
               <a:rPr lang="ko-KR"/>
-              <a:t>0000. 00. 00</a:t>
+              <a:t>날짜 입력</a:t>
             </a:r>
           </a:p>
         </p:txBody>
@@ -4262,7 +4262,7 @@
           <a:bodyPr/>
           <a:lstStyle/>
           <a:p>
-            <a:fld id="{85A8D94E-30EA-4844-9E4E-19F25D07D1CF}" type="slidenum">
+            <a:fld id="{932B1357-1B96-4164-9E0F-889B2AED65F3}" type="slidenum">
               <a:rPr lang="en-US"/>
               <a:t>‹#›</a:t>
             </a:fld>
@@ -5448,7 +5448,7 @@
           <a:bodyPr/>
           <a:lstStyle/>
           <a:p>
-            <a:fld id="{670AC40D-7A89-41C5-9D3F-B5CB345D943B}" type="slidenum">
+            <a:fld id="{8D0C984C-235A-4FB0-AC56-07898E94A78A}" type="slidenum">
               <a:rPr lang="en-US"/>
               <a:t>‹#›</a:t>
             </a:fld>
@@ -5536,7 +5536,7 @@
           <a:bodyPr/>
           <a:lstStyle/>
           <a:p>
-            <a:fld id="{476B8EAB-C946-4370-8017-D0F048209086}" type="slidenum">
+            <a:fld id="{E5ECB3A1-415A-4C15-9649-D15C081064A1}" type="slidenum">
               <a:rPr lang="en-US"/>
               <a:t>‹#›</a:t>
             </a:fld>
@@ -6497,7 +6497,7 @@
           <a:bodyPr/>
           <a:lstStyle/>
           <a:p>
-            <a:fld id="{CFAA21E2-B2D1-48F2-ABB1-F3F7875505B1}" type="slidenum">
+            <a:fld id="{7833A6F9-AB3B-46F4-BB67-8D14D7E00D0D}" type="slidenum">
               <a:rPr lang="en-US"/>
               <a:t>‹#›</a:t>
             </a:fld>
@@ -7137,7 +7137,7 @@
           <a:bodyPr/>
           <a:lstStyle/>
           <a:p>
-            <a:fld id="{414E1780-2019-44CF-A07D-A82FEE6FC788}" type="slidenum">
+            <a:fld id="{70C34A34-9ACC-4856-92F2-B2B5FDE049D1}" type="slidenum">
               <a:rPr lang="en-US"/>
               <a:t>‹#›</a:t>
             </a:fld>
@@ -7320,7 +7320,7 @@
           <a:bodyPr/>
           <a:lstStyle/>
           <a:p>
-            <a:fld id="{C2DB5A08-DA5F-400B-9169-7DAB7FCEA30F}" type="slidenum">
+            <a:fld id="{F6E269F7-DA63-464D-845D-131FA1487558}" type="slidenum">
               <a:rPr lang="en-US"/>
               <a:t>‹#›</a:t>
             </a:fld>
@@ -8384,7 +8384,7 @@
           <a:bodyPr/>
           <a:lstStyle/>
           <a:p>
-            <a:fld id="{2C3764BB-FC8E-4468-BD4A-378E99F0B6D5}" type="slidenum">
+            <a:fld id="{37300D74-609D-4DED-A085-2C27DBE9876E}" type="slidenum">
               <a:rPr lang="en-US"/>
               <a:t>‹#›</a:t>
             </a:fld>
